--- a/QuizChallenge2/slides/QuizChallenge2.pptx
+++ b/QuizChallenge2/slides/QuizChallenge2.pptx
@@ -15,6 +15,7 @@
     <p:sldId id="263" r:id="rId14"/>
     <p:sldId id="264" r:id="rId15"/>
     <p:sldId id="265" r:id="rId16"/>
+    <p:sldId id="266" r:id="rId17"/>
   </p:sldIdLst>
   <p:sldSz cx="12191695" cy="6858000" type="screen4x3"/>
   <p:notesSz cx="6858000" cy="9144000"/>
@@ -3268,21 +3269,45 @@
                   <a:srgbClr val="1A335C"/>
                 </a:solidFill>
               </a:rPr>
-              <a:t>Limitations  ·  Ethics  ·  Future work  ·  AI disclosure</a:t>
-            </a:r>
-          </a:p>
-        </p:txBody>
-      </p:sp>
-      <p:sp>
-        <p:nvSpPr>
-          <p:cNvPr id="3" name="TextBox 2"/>
+              <a:t>Listening test — Vector A is not perceptually covert</a:t>
+            </a:r>
+          </a:p>
+        </p:txBody>
+      </p:sp>
+      <p:pic>
+        <p:nvPicPr>
+          <p:cNvPr id="3" name="Picture 2" descr="05_listening_mos.png"/>
+          <p:cNvPicPr>
+            <a:picLocks noChangeAspect="1"/>
+          </p:cNvPicPr>
+          <p:nvPr/>
+        </p:nvPicPr>
+        <p:blipFill>
+          <a:blip r:embed="rId2"/>
+          <a:stretch>
+            <a:fillRect/>
+          </a:stretch>
+        </p:blipFill>
+        <p:spPr>
+          <a:xfrm>
+            <a:off x="548640" y="1097280"/>
+            <a:ext cx="7680960" cy="4788912"/>
+          </a:xfrm>
+          <a:prstGeom prst="rect">
+            <a:avLst/>
+          </a:prstGeom>
+        </p:spPr>
+      </p:pic>
+      <p:sp>
+        <p:nvSpPr>
+          <p:cNvPr id="4" name="TextBox 3"/>
           <p:cNvSpPr txBox="1"/>
           <p:nvPr/>
         </p:nvSpPr>
         <p:spPr>
           <a:xfrm>
-            <a:off x="457200" y="1097280"/>
-            <a:ext cx="5669280" cy="548640"/>
+            <a:off x="8503920" y="1280160"/>
+            <a:ext cx="3383280" cy="5029200"/>
           </a:xfrm>
           <a:prstGeom prst="rect">
             <a:avLst/>
@@ -3297,26 +3322,132 @@
           <a:p>
             <a:pPr algn="l"/>
             <a:r>
-              <a:rPr sz="2000" b="1">
+              <a:rPr sz="1800" b="1">
                 <a:solidFill>
                   <a:srgbClr val="C0392B"/>
                 </a:solidFill>
               </a:rPr>
-              <a:t>Limitations</a:t>
-            </a:r>
-          </a:p>
-        </p:txBody>
-      </p:sp>
-      <p:sp>
-        <p:nvSpPr>
-          <p:cNvPr id="4" name="TextBox 3"/>
+              <a:t>Setup</a:t>
+            </a:r>
+          </a:p>
+          <a:p>
+            <a:pPr algn="l"/>
+            <a:r>
+              <a:rPr sz="1200" b="0">
+                <a:solidFill>
+                  <a:srgbClr val="1A335C"/>
+                </a:solidFill>
+              </a:rPr>
+              <a:t>n=1 self-rated, not formally blinded. Listener had not memorized the secret texts before listening.</a:t>
+            </a:r>
+          </a:p>
+          <a:p>
+            <a:pPr algn="l"/>
+            <a:r>
+              <a:rPr sz="1800" b="1">
+                <a:solidFill>
+                  <a:srgbClr val="C0392B"/>
+                </a:solidFill>
+              </a:rPr>
+              <a:t>Headline result</a:t>
+            </a:r>
+          </a:p>
+          <a:p>
+            <a:pPr algn="l"/>
+            <a:r>
+              <a:rPr sz="1200" b="1">
+                <a:solidFill>
+                  <a:srgbClr val="1A335C"/>
+                </a:solidFill>
+              </a:rPr>
+              <a:t>Listener recovered 'the quick brown fox jumps over the lazy dog' VERBATIM from clips at α=-6, -18, -30 dB and the bandpass variant — without prior memorisation.</a:t>
+            </a:r>
+          </a:p>
+          <a:p>
+            <a:pPr algn="l"/>
+            <a:r>
+              <a:rPr sz="1400" b="1">
+                <a:solidFill>
+                  <a:srgbClr val="C0392B"/>
+                </a:solidFill>
+              </a:rPr>
+              <a:t>Vector A is not covert at any tested setting.</a:t>
+            </a:r>
+          </a:p>
+          <a:p>
+            <a:pPr algn="l"/>
+            <a:r>
+              <a:rPr sz="1800" b="1">
+                <a:solidFill>
+                  <a:srgbClr val="C0392B"/>
+                </a:solidFill>
+              </a:rPr>
+              <a:t>Music vs speech</a:t>
+            </a:r>
+          </a:p>
+          <a:p>
+            <a:pPr algn="l"/>
+            <a:r>
+              <a:rPr sz="1200" b="0">
+                <a:solidFill>
+                  <a:srgbClr val="1A335C"/>
+                </a:solidFill>
+              </a:rPr>
+              <a:t>Music quality drops 5 → 1 with vocals at α=-6; recovers to 3 at α=-30 (loud vocals destroy the cover).</a:t>
+            </a:r>
+          </a:p>
+          <a:p>
+            <a:pPr algn="l"/>
+            <a:r>
+              <a:rPr sz="1800" b="1">
+                <a:solidFill>
+                  <a:srgbClr val="C0392B"/>
+                </a:solidFill>
+              </a:rPr>
+              <a:t>Vector B sanity check</a:t>
+            </a:r>
+          </a:p>
+          <a:p>
+            <a:pPr algn="l"/>
+            <a:r>
+              <a:rPr sz="1200" b="0">
+                <a:solidFill>
+                  <a:srgbClr val="1A335C"/>
+                </a:solidFill>
+              </a:rPr>
+              <a:t>Clean carriers rated 5/5 music, 1/5 speech — confirms B has no leaked speech.</a:t>
+            </a:r>
+          </a:p>
+        </p:txBody>
+      </p:sp>
+    </p:spTree>
+  </p:cSld>
+  <p:clrMapOvr>
+    <a:masterClrMapping/>
+  </p:clrMapOvr>
+</p:sld>
+</file>
+
+<file path=ppt/slides/slide11.xml><?xml version="1.0" encoding="utf-8"?>
+<p:sld xmlns:a="http://schemas.openxmlformats.org/drawingml/2006/main" xmlns:p="http://schemas.openxmlformats.org/presentationml/2006/main" xmlns:r="http://schemas.openxmlformats.org/officeDocument/2006/relationships">
+  <p:cSld>
+    <p:spTree>
+      <p:nvGrpSpPr>
+        <p:cNvPr id="1" name=""/>
+        <p:cNvGrpSpPr/>
+        <p:nvPr/>
+      </p:nvGrpSpPr>
+      <p:grpSpPr/>
+      <p:sp>
+        <p:nvSpPr>
+          <p:cNvPr id="2" name="TextBox 1"/>
           <p:cNvSpPr txBox="1"/>
           <p:nvPr/>
         </p:nvSpPr>
         <p:spPr>
           <a:xfrm>
-            <a:off x="640080" y="1691640"/>
-            <a:ext cx="5486400" cy="2194560"/>
+            <a:off x="457200" y="228600"/>
+            <a:ext cx="11247120" cy="640080"/>
           </a:xfrm>
           <a:prstGeom prst="rect">
             <a:avLst/>
@@ -3331,12 +3462,80 @@
           <a:p>
             <a:pPr algn="l"/>
             <a:r>
+              <a:rPr sz="3000" b="1">
+                <a:solidFill>
+                  <a:srgbClr val="1A335C"/>
+                </a:solidFill>
+              </a:rPr>
+              <a:t>Limitations  ·  Ethics  ·  Future work  ·  AI disclosure</a:t>
+            </a:r>
+          </a:p>
+        </p:txBody>
+      </p:sp>
+      <p:sp>
+        <p:nvSpPr>
+          <p:cNvPr id="3" name="TextBox 2"/>
+          <p:cNvSpPr txBox="1"/>
+          <p:nvPr/>
+        </p:nvSpPr>
+        <p:spPr>
+          <a:xfrm>
+            <a:off x="457200" y="1097280"/>
+            <a:ext cx="5669280" cy="548640"/>
+          </a:xfrm>
+          <a:prstGeom prst="rect">
+            <a:avLst/>
+          </a:prstGeom>
+          <a:noFill/>
+        </p:spPr>
+        <p:txBody>
+          <a:bodyPr wrap="square">
+            <a:spAutoFit/>
+          </a:bodyPr>
+          <a:lstStyle/>
+          <a:p>
+            <a:pPr algn="l"/>
+            <a:r>
+              <a:rPr sz="2000" b="1">
+                <a:solidFill>
+                  <a:srgbClr val="C0392B"/>
+                </a:solidFill>
+              </a:rPr>
+              <a:t>Limitations</a:t>
+            </a:r>
+          </a:p>
+        </p:txBody>
+      </p:sp>
+      <p:sp>
+        <p:nvSpPr>
+          <p:cNvPr id="4" name="TextBox 3"/>
+          <p:cNvSpPr txBox="1"/>
+          <p:nvPr/>
+        </p:nvSpPr>
+        <p:spPr>
+          <a:xfrm>
+            <a:off x="640080" y="1691640"/>
+            <a:ext cx="5486400" cy="2194560"/>
+          </a:xfrm>
+          <a:prstGeom prst="rect">
+            <a:avLst/>
+          </a:prstGeom>
+          <a:noFill/>
+        </p:spPr>
+        <p:txBody>
+          <a:bodyPr wrap="square">
+            <a:spAutoFit/>
+          </a:bodyPr>
+          <a:lstStyle/>
+          <a:p>
+            <a:pPr algn="l"/>
+            <a:r>
               <a:rPr sz="1300" b="0">
                 <a:solidFill>
                   <a:srgbClr val="1A335C"/>
                 </a:solidFill>
               </a:rPr>
-              <a:t>•  No human listening test (n=0) — flagged as next-step</a:t>
+              <a:t>•  Listening test n=1 self-rated, not formally blinded</a:t>
             </a:r>
           </a:p>
           <a:p>
